--- a/Event and ticket booking system(project)/Documents/Event_Ticket_Booking_System(Final).pptx
+++ b/Event and ticket booking system(project)/Documents/Event_Ticket_Booking_System(Final).pptx
@@ -218,7 +218,7 @@
           <a:p>
             <a:fld id="{BD8DE5F0-F600-46C3-AE4D-5148C69FFBAD}" type="datetimeFigureOut">
               <a:rPr lang="en-US" smtClean="0"/>
-              <a:t>9/10/2025</a:t>
+              <a:t>9/11/2025</a:t>
             </a:fld>
             <a:endParaRPr lang="en-US"/>
           </a:p>
@@ -824,7 +824,7 @@
           <a:p>
             <a:fld id="{8CFBE4D0-E68C-4FB2-8B3A-AA41DAF039F9}" type="datetimeFigureOut">
               <a:rPr lang="en-US" smtClean="0"/>
-              <a:t>9/10/2025</a:t>
+              <a:t>9/11/2025</a:t>
             </a:fld>
             <a:endParaRPr lang="en-US"/>
           </a:p>
@@ -1022,7 +1022,7 @@
           <a:p>
             <a:fld id="{8CFBE4D0-E68C-4FB2-8B3A-AA41DAF039F9}" type="datetimeFigureOut">
               <a:rPr lang="en-US" smtClean="0"/>
-              <a:t>9/10/2025</a:t>
+              <a:t>9/11/2025</a:t>
             </a:fld>
             <a:endParaRPr lang="en-US"/>
           </a:p>
@@ -1230,7 +1230,7 @@
           <a:p>
             <a:fld id="{8CFBE4D0-E68C-4FB2-8B3A-AA41DAF039F9}" type="datetimeFigureOut">
               <a:rPr lang="en-US" smtClean="0"/>
-              <a:t>9/10/2025</a:t>
+              <a:t>9/11/2025</a:t>
             </a:fld>
             <a:endParaRPr lang="en-US"/>
           </a:p>
@@ -1428,7 +1428,7 @@
           <a:p>
             <a:fld id="{8CFBE4D0-E68C-4FB2-8B3A-AA41DAF039F9}" type="datetimeFigureOut">
               <a:rPr lang="en-US" smtClean="0"/>
-              <a:t>9/10/2025</a:t>
+              <a:t>9/11/2025</a:t>
             </a:fld>
             <a:endParaRPr lang="en-US"/>
           </a:p>
@@ -1703,7 +1703,7 @@
           <a:p>
             <a:fld id="{8CFBE4D0-E68C-4FB2-8B3A-AA41DAF039F9}" type="datetimeFigureOut">
               <a:rPr lang="en-US" smtClean="0"/>
-              <a:t>9/10/2025</a:t>
+              <a:t>9/11/2025</a:t>
             </a:fld>
             <a:endParaRPr lang="en-US"/>
           </a:p>
@@ -1968,7 +1968,7 @@
           <a:p>
             <a:fld id="{8CFBE4D0-E68C-4FB2-8B3A-AA41DAF039F9}" type="datetimeFigureOut">
               <a:rPr lang="en-US" smtClean="0"/>
-              <a:t>9/10/2025</a:t>
+              <a:t>9/11/2025</a:t>
             </a:fld>
             <a:endParaRPr lang="en-US"/>
           </a:p>
@@ -2380,7 +2380,7 @@
           <a:p>
             <a:fld id="{8CFBE4D0-E68C-4FB2-8B3A-AA41DAF039F9}" type="datetimeFigureOut">
               <a:rPr lang="en-US" smtClean="0"/>
-              <a:t>9/10/2025</a:t>
+              <a:t>9/11/2025</a:t>
             </a:fld>
             <a:endParaRPr lang="en-US"/>
           </a:p>
@@ -2521,7 +2521,7 @@
           <a:p>
             <a:fld id="{8CFBE4D0-E68C-4FB2-8B3A-AA41DAF039F9}" type="datetimeFigureOut">
               <a:rPr lang="en-US" smtClean="0"/>
-              <a:t>9/10/2025</a:t>
+              <a:t>9/11/2025</a:t>
             </a:fld>
             <a:endParaRPr lang="en-US"/>
           </a:p>
@@ -2634,7 +2634,7 @@
           <a:p>
             <a:fld id="{8CFBE4D0-E68C-4FB2-8B3A-AA41DAF039F9}" type="datetimeFigureOut">
               <a:rPr lang="en-US" smtClean="0"/>
-              <a:t>9/10/2025</a:t>
+              <a:t>9/11/2025</a:t>
             </a:fld>
             <a:endParaRPr lang="en-US"/>
           </a:p>
@@ -2945,7 +2945,7 @@
           <a:p>
             <a:fld id="{8CFBE4D0-E68C-4FB2-8B3A-AA41DAF039F9}" type="datetimeFigureOut">
               <a:rPr lang="en-US" smtClean="0"/>
-              <a:t>9/10/2025</a:t>
+              <a:t>9/11/2025</a:t>
             </a:fld>
             <a:endParaRPr lang="en-US"/>
           </a:p>
@@ -3233,7 +3233,7 @@
           <a:p>
             <a:fld id="{8CFBE4D0-E68C-4FB2-8B3A-AA41DAF039F9}" type="datetimeFigureOut">
               <a:rPr lang="en-US" smtClean="0"/>
-              <a:t>9/10/2025</a:t>
+              <a:t>9/11/2025</a:t>
             </a:fld>
             <a:endParaRPr lang="en-US"/>
           </a:p>
@@ -3498,7 +3498,7 @@
           <a:p>
             <a:fld id="{8CFBE4D0-E68C-4FB2-8B3A-AA41DAF039F9}" type="datetimeFigureOut">
               <a:rPr lang="en-US" smtClean="0"/>
-              <a:t>9/10/2025</a:t>
+              <a:t>9/11/2025</a:t>
             </a:fld>
             <a:endParaRPr lang="en-US"/>
           </a:p>
@@ -4487,7 +4487,7 @@
         </p:blipFill>
         <p:spPr>
           <a:xfrm>
-            <a:off x="1284514" y="2188030"/>
+            <a:off x="1284514" y="2198916"/>
             <a:ext cx="5279572" cy="2481942"/>
           </a:xfrm>
           <a:prstGeom prst="rect">

--- a/Event and ticket booking system(project)/Documents/Event_Ticket_Booking_System(Final).pptx
+++ b/Event and ticket booking system(project)/Documents/Event_Ticket_Booking_System(Final).pptx
@@ -5049,7 +5049,7 @@
           <a:lstStyle/>
           <a:p>
             <a:r>
-              <a:rPr lang="en-IN" sz="4400" b="1" dirty="0">
+              <a:rPr lang="en-IN" sz="4400" b="1">
                 <a:solidFill>
                   <a:schemeClr val="accent1"/>
                 </a:solidFill>
@@ -5059,7 +5059,7 @@
               <a:t>Project</a:t>
             </a:r>
             <a:r>
-              <a:rPr lang="en-IN" sz="4400" b="1" dirty="0">
+              <a:rPr lang="en-IN" sz="4400" b="1">
                 <a:solidFill>
                   <a:schemeClr val="bg1"/>
                 </a:solidFill>
@@ -5069,14 +5069,14 @@
               <a:t> </a:t>
             </a:r>
             <a:r>
-              <a:rPr lang="en-IN" sz="4400" b="1" dirty="0" err="1">
+              <a:rPr lang="en-IN" sz="4400" b="1">
                 <a:solidFill>
                   <a:schemeClr val="accent1"/>
                 </a:solidFill>
                 <a:latin typeface="Poppins" panose="00000500000000000000" pitchFamily="2" charset="0"/>
                 <a:cs typeface="Poppins" panose="00000500000000000000" pitchFamily="2" charset="0"/>
               </a:rPr>
-              <a:t>Workfolw</a:t>
+              <a:t>Workflow</a:t>
             </a:r>
             <a:endParaRPr lang="en-IN" sz="4400" b="1" dirty="0">
               <a:solidFill>
@@ -8761,29 +8761,33 @@
         </p:nvSpPr>
         <p:spPr>
           <a:xfrm>
-            <a:off x="838200" y="103869"/>
+            <a:off x="838200" y="225188"/>
             <a:ext cx="10515600" cy="429531"/>
           </a:xfrm>
         </p:spPr>
         <p:txBody>
           <a:bodyPr>
-            <a:normAutofit fontScale="90000"/>
+            <a:noAutofit/>
           </a:bodyPr>
           <a:lstStyle/>
           <a:p>
             <a:pPr algn="ctr"/>
             <a:r>
-              <a:rPr lang="en-US" dirty="0">
+              <a:rPr lang="en-US" b="1" dirty="0">
                 <a:solidFill>
                   <a:schemeClr val="accent1"/>
                 </a:solidFill>
+                <a:latin typeface="Poppins" panose="00000500000000000000" pitchFamily="2" charset="0"/>
+                <a:cs typeface="Poppins" panose="00000500000000000000" pitchFamily="2" charset="0"/>
               </a:rPr>
               <a:t>API Endpoint Overview</a:t>
             </a:r>
-            <a:endParaRPr lang="en-IN" dirty="0">
+            <a:endParaRPr lang="en-IN" b="1" dirty="0">
               <a:solidFill>
                 <a:schemeClr val="accent1"/>
               </a:solidFill>
+              <a:latin typeface="Poppins" panose="00000500000000000000" pitchFamily="2" charset="0"/>
+              <a:cs typeface="Poppins" panose="00000500000000000000" pitchFamily="2" charset="0"/>
             </a:endParaRPr>
           </a:p>
         </p:txBody>
@@ -8804,13 +8808,13 @@
             <p:ph idx="1"/>
             <p:extLst>
               <p:ext uri="{D42A27DB-BD31-4B8C-83A1-F6EECF244321}">
-                <p14:modId xmlns:p14="http://schemas.microsoft.com/office/powerpoint/2010/main" val="3634361088"/>
+                <p14:modId xmlns:p14="http://schemas.microsoft.com/office/powerpoint/2010/main" val="1713057488"/>
               </p:ext>
             </p:extLst>
           </p:nvPr>
         </p:nvGraphicFramePr>
         <p:xfrm>
-          <a:off x="391886" y="881742"/>
+          <a:off x="391886" y="1082468"/>
           <a:ext cx="11321143" cy="4310552"/>
         </p:xfrm>
         <a:graphic>
